--- a/shared/Nedelya_02_Slaydy.pptx
+++ b/shared/Nedelya_02_Slaydy.pptx
@@ -1925,7 +1925,7 @@
     <p:bg>
       <p:bgPr>
         <a:solidFill>
-          <a:srgbClr val="1A1A1A"/>
+          <a:srgbClr val="005AAA"/>
         </a:solidFill>
       </p:bgPr>
     </p:bg>
@@ -1970,7 +1970,7 @@
             <a:r>
               <a:rPr lang="en-US" sz="1200" spc="150" kern="0" dirty="0">
                 <a:solidFill>
-                  <a:srgbClr val="9E9E9E"/>
+                  <a:srgbClr val="A8C6E2"/>
                 </a:solidFill>
                 <a:latin typeface="Arial" pitchFamily="34" charset="0"/>
                 <a:ea typeface="Arial" pitchFamily="34" charset="-122"/>
@@ -2048,7 +2048,7 @@
             <a:r>
               <a:rPr lang="en-US" sz="1700" dirty="0">
                 <a:solidFill>
-                  <a:srgbClr val="C9C9C9"/>
+                  <a:srgbClr val="D6E6F2"/>
                 </a:solidFill>
                 <a:latin typeface="Arial" pitchFamily="34" charset="0"/>
                 <a:ea typeface="Arial" pitchFamily="34" charset="-122"/>
@@ -2087,7 +2087,7 @@
             <a:r>
               <a:rPr lang="en-US" sz="1200" dirty="0">
                 <a:solidFill>
-                  <a:srgbClr val="9E9E9E"/>
+                  <a:srgbClr val="A8C6E2"/>
                 </a:solidFill>
                 <a:latin typeface="Arial" pitchFamily="34" charset="0"/>
                 <a:ea typeface="Arial" pitchFamily="34" charset="-122"/>
@@ -2158,7 +2158,7 @@
             <a:r>
               <a:rPr lang="en-US" sz="1200" spc="150" kern="0" dirty="0">
                 <a:solidFill>
-                  <a:srgbClr val="6E6E6E"/>
+                  <a:srgbClr val="64748B"/>
                 </a:solidFill>
                 <a:latin typeface="Arial" pitchFamily="34" charset="0"/>
                 <a:ea typeface="Arial" pitchFamily="34" charset="-122"/>
@@ -2197,7 +2197,7 @@
             <a:r>
               <a:rPr lang="en-US" sz="3000" b="1" dirty="0">
                 <a:solidFill>
-                  <a:srgbClr val="1A1A1A"/>
+                  <a:srgbClr val="005AAA"/>
                 </a:solidFill>
                 <a:latin typeface="Arial" pitchFamily="34" charset="0"/>
                 <a:ea typeface="Arial" pitchFamily="34" charset="-122"/>
@@ -2236,7 +2236,7 @@
             <a:r>
               <a:rPr lang="en-US" sz="1700" dirty="0">
                 <a:solidFill>
-                  <a:srgbClr val="1A1A1A"/>
+                  <a:srgbClr val="1E293B"/>
                 </a:solidFill>
                 <a:latin typeface="Arial" pitchFamily="34" charset="0"/>
                 <a:ea typeface="Arial" pitchFamily="34" charset="-122"/>
@@ -2265,11 +2265,11 @@
             </a:avLst>
           </a:prstGeom>
           <a:solidFill>
-            <a:srgbClr val="F2F2F2"/>
+            <a:srgbClr val="F8FAFC"/>
           </a:solidFill>
-          <a:ln w="6350">
+          <a:ln w="9525">
             <a:solidFill>
-              <a:srgbClr val="B3B3B3"/>
+              <a:srgbClr val="CBD5E1"/>
             </a:solidFill>
             <a:prstDash val="solid"/>
           </a:ln>
@@ -2302,7 +2302,7 @@
             <a:r>
               <a:rPr lang="en-US" sz="1600" b="1" dirty="0">
                 <a:solidFill>
-                  <a:srgbClr val="1A1A1A"/>
+                  <a:srgbClr val="1E293B"/>
                 </a:solidFill>
                 <a:latin typeface="Arial" pitchFamily="34" charset="0"/>
                 <a:ea typeface="Arial" pitchFamily="34" charset="-122"/>
@@ -2341,7 +2341,7 @@
             <a:r>
               <a:rPr lang="en-US" sz="1000" dirty="0">
                 <a:solidFill>
-                  <a:srgbClr val="6E6E6E"/>
+                  <a:srgbClr val="64748B"/>
                 </a:solidFill>
                 <a:latin typeface="Arial" pitchFamily="34" charset="0"/>
                 <a:ea typeface="Arial" pitchFamily="34" charset="-122"/>
@@ -2412,7 +2412,7 @@
             <a:r>
               <a:rPr lang="en-US" sz="1200" spc="150" kern="0" dirty="0">
                 <a:solidFill>
-                  <a:srgbClr val="6E6E6E"/>
+                  <a:srgbClr val="64748B"/>
                 </a:solidFill>
                 <a:latin typeface="Arial" pitchFamily="34" charset="0"/>
                 <a:ea typeface="Arial" pitchFamily="34" charset="-122"/>
@@ -2451,7 +2451,7 @@
             <a:r>
               <a:rPr lang="en-US" sz="3000" b="1" dirty="0">
                 <a:solidFill>
-                  <a:srgbClr val="1A1A1A"/>
+                  <a:srgbClr val="005AAA"/>
                 </a:solidFill>
                 <a:latin typeface="Arial" pitchFamily="34" charset="0"/>
                 <a:ea typeface="Arial" pitchFamily="34" charset="-122"/>
@@ -2490,7 +2490,7 @@
             <a:r>
               <a:rPr lang="en-US" sz="1600" dirty="0">
                 <a:solidFill>
-                  <a:srgbClr val="1A1A1A"/>
+                  <a:srgbClr val="1E293B"/>
                 </a:solidFill>
                 <a:latin typeface="Arial" pitchFamily="34" charset="0"/>
                 <a:ea typeface="Arial" pitchFamily="34" charset="-122"/>
@@ -2529,7 +2529,7 @@
             <a:r>
               <a:rPr lang="en-US" sz="1100" dirty="0">
                 <a:solidFill>
-                  <a:srgbClr val="6E6E6E"/>
+                  <a:srgbClr val="64748B"/>
                 </a:solidFill>
                 <a:latin typeface="Arial" pitchFamily="34" charset="0"/>
                 <a:ea typeface="Arial" pitchFamily="34" charset="-122"/>
@@ -2568,7 +2568,7 @@
             <a:r>
               <a:rPr lang="en-US" sz="1600" dirty="0">
                 <a:solidFill>
-                  <a:srgbClr val="1A1A1A"/>
+                  <a:srgbClr val="1E293B"/>
                 </a:solidFill>
                 <a:latin typeface="Arial" pitchFamily="34" charset="0"/>
                 <a:ea typeface="Arial" pitchFamily="34" charset="-122"/>
@@ -2607,7 +2607,7 @@
             <a:r>
               <a:rPr lang="en-US" sz="1100" dirty="0">
                 <a:solidFill>
-                  <a:srgbClr val="6E6E6E"/>
+                  <a:srgbClr val="64748B"/>
                 </a:solidFill>
                 <a:latin typeface="Arial" pitchFamily="34" charset="0"/>
                 <a:ea typeface="Arial" pitchFamily="34" charset="-122"/>
@@ -2646,7 +2646,7 @@
             <a:r>
               <a:rPr lang="en-US" sz="1600" dirty="0">
                 <a:solidFill>
-                  <a:srgbClr val="1A1A1A"/>
+                  <a:srgbClr val="1E293B"/>
                 </a:solidFill>
                 <a:latin typeface="Arial" pitchFamily="34" charset="0"/>
                 <a:ea typeface="Arial" pitchFamily="34" charset="-122"/>
@@ -2685,7 +2685,7 @@
             <a:r>
               <a:rPr lang="en-US" sz="1100" dirty="0">
                 <a:solidFill>
-                  <a:srgbClr val="6E6E6E"/>
+                  <a:srgbClr val="64748B"/>
                 </a:solidFill>
                 <a:latin typeface="Arial" pitchFamily="34" charset="0"/>
                 <a:ea typeface="Arial" pitchFamily="34" charset="-122"/>
@@ -2724,7 +2724,7 @@
             <a:r>
               <a:rPr lang="en-US" sz="1600" dirty="0">
                 <a:solidFill>
-                  <a:srgbClr val="1A1A1A"/>
+                  <a:srgbClr val="1E293B"/>
                 </a:solidFill>
                 <a:latin typeface="Arial" pitchFamily="34" charset="0"/>
                 <a:ea typeface="Arial" pitchFamily="34" charset="-122"/>
@@ -2763,7 +2763,7 @@
             <a:r>
               <a:rPr lang="en-US" sz="1100" dirty="0">
                 <a:solidFill>
-                  <a:srgbClr val="6E6E6E"/>
+                  <a:srgbClr val="64748B"/>
                 </a:solidFill>
                 <a:latin typeface="Arial" pitchFamily="34" charset="0"/>
                 <a:ea typeface="Arial" pitchFamily="34" charset="-122"/>
@@ -2802,7 +2802,7 @@
             <a:r>
               <a:rPr lang="en-US" sz="1000" dirty="0">
                 <a:solidFill>
-                  <a:srgbClr val="6E6E6E"/>
+                  <a:srgbClr val="64748B"/>
                 </a:solidFill>
                 <a:latin typeface="Arial" pitchFamily="34" charset="0"/>
                 <a:ea typeface="Arial" pitchFamily="34" charset="-122"/>
@@ -2828,7 +2828,7 @@
     <p:bg>
       <p:bgPr>
         <a:solidFill>
-          <a:srgbClr val="1A1A1A"/>
+          <a:srgbClr val="005AAA"/>
         </a:solidFill>
       </p:bgPr>
     </p:bg>
@@ -2935,7 +2935,7 @@
             <a:r>
               <a:rPr lang="en-US" sz="1600" dirty="0">
                 <a:solidFill>
-                  <a:srgbClr val="C9C9C9"/>
+                  <a:srgbClr val="D6E6F2"/>
                 </a:solidFill>
                 <a:latin typeface="Arial" pitchFamily="34" charset="0"/>
                 <a:ea typeface="Arial" pitchFamily="34" charset="-122"/>
@@ -3006,7 +3006,7 @@
             <a:r>
               <a:rPr lang="en-US" sz="1200" spc="150" kern="0" dirty="0">
                 <a:solidFill>
-                  <a:srgbClr val="6E6E6E"/>
+                  <a:srgbClr val="64748B"/>
                 </a:solidFill>
                 <a:latin typeface="Arial" pitchFamily="34" charset="0"/>
                 <a:ea typeface="Arial" pitchFamily="34" charset="-122"/>
@@ -3045,7 +3045,7 @@
             <a:r>
               <a:rPr lang="en-US" sz="3000" b="1" dirty="0">
                 <a:solidFill>
-                  <a:srgbClr val="1A1A1A"/>
+                  <a:srgbClr val="005AAA"/>
                 </a:solidFill>
                 <a:latin typeface="Arial" pitchFamily="34" charset="0"/>
                 <a:ea typeface="Arial" pitchFamily="34" charset="-122"/>
@@ -3084,7 +3084,7 @@
             <a:r>
               <a:rPr lang="en-US" sz="1500" b="1" dirty="0">
                 <a:solidFill>
-                  <a:srgbClr val="1A1A1A"/>
+                  <a:srgbClr val="1E293B"/>
                 </a:solidFill>
                 <a:latin typeface="Arial" pitchFamily="34" charset="0"/>
                 <a:ea typeface="Arial" pitchFamily="34" charset="-122"/>
@@ -3101,7 +3101,7 @@
             <a:r>
               <a:rPr lang="en-US" sz="1400" dirty="0">
                 <a:solidFill>
-                  <a:srgbClr val="1A1A1A"/>
+                  <a:srgbClr val="1E293B"/>
                 </a:solidFill>
                 <a:latin typeface="Arial" pitchFamily="34" charset="0"/>
                 <a:ea typeface="Arial" pitchFamily="34" charset="-122"/>
@@ -3130,11 +3130,11 @@
             </a:avLst>
           </a:prstGeom>
           <a:solidFill>
-            <a:srgbClr val="F2F2F2"/>
+            <a:srgbClr val="F8FAFC"/>
           </a:solidFill>
-          <a:ln w="6350">
+          <a:ln w="9525">
             <a:solidFill>
-              <a:srgbClr val="B3B3B3"/>
+              <a:srgbClr val="CBD5E1"/>
             </a:solidFill>
             <a:prstDash val="solid"/>
           </a:ln>
@@ -3167,7 +3167,7 @@
             <a:r>
               <a:rPr lang="en-US" sz="1500" b="1" dirty="0">
                 <a:solidFill>
-                  <a:srgbClr val="1A1A1A"/>
+                  <a:srgbClr val="1E293B"/>
                 </a:solidFill>
                 <a:latin typeface="Arial" pitchFamily="34" charset="0"/>
                 <a:ea typeface="Arial" pitchFamily="34" charset="-122"/>
@@ -3184,7 +3184,7 @@
             <a:r>
               <a:rPr lang="en-US" sz="1400" dirty="0">
                 <a:solidFill>
-                  <a:srgbClr val="1A1A1A"/>
+                  <a:srgbClr val="1E293B"/>
                 </a:solidFill>
                 <a:latin typeface="Arial" pitchFamily="34" charset="0"/>
                 <a:ea typeface="Arial" pitchFamily="34" charset="-122"/>
@@ -3223,7 +3223,7 @@
             <a:r>
               <a:rPr lang="en-US" sz="1000" dirty="0">
                 <a:solidFill>
-                  <a:srgbClr val="6E6E6E"/>
+                  <a:srgbClr val="64748B"/>
                 </a:solidFill>
                 <a:latin typeface="Arial" pitchFamily="34" charset="0"/>
                 <a:ea typeface="Arial" pitchFamily="34" charset="-122"/>
@@ -3294,7 +3294,7 @@
             <a:r>
               <a:rPr lang="en-US" sz="1200" spc="150" kern="0" dirty="0">
                 <a:solidFill>
-                  <a:srgbClr val="6E6E6E"/>
+                  <a:srgbClr val="64748B"/>
                 </a:solidFill>
                 <a:latin typeface="Arial" pitchFamily="34" charset="0"/>
                 <a:ea typeface="Arial" pitchFamily="34" charset="-122"/>
@@ -3333,7 +3333,7 @@
             <a:r>
               <a:rPr lang="en-US" sz="3000" b="1" dirty="0">
                 <a:solidFill>
-                  <a:srgbClr val="1A1A1A"/>
+                  <a:srgbClr val="005AAA"/>
                 </a:solidFill>
                 <a:latin typeface="Arial" pitchFamily="34" charset="0"/>
                 <a:ea typeface="Arial" pitchFamily="34" charset="-122"/>
@@ -3372,7 +3372,7 @@
             <a:r>
               <a:rPr lang="en-US" sz="2200" b="1" dirty="0">
                 <a:solidFill>
-                  <a:srgbClr val="1A1A1A"/>
+                  <a:srgbClr val="1E293B"/>
                 </a:solidFill>
                 <a:latin typeface="Arial" pitchFamily="34" charset="0"/>
                 <a:ea typeface="Arial" pitchFamily="34" charset="-122"/>
@@ -3411,7 +3411,7 @@
             <a:r>
               <a:rPr lang="en-US" sz="1000" dirty="0">
                 <a:solidFill>
-                  <a:srgbClr val="6E6E6E"/>
+                  <a:srgbClr val="64748B"/>
                 </a:solidFill>
                 <a:latin typeface="Arial" pitchFamily="34" charset="0"/>
                 <a:ea typeface="Arial" pitchFamily="34" charset="-122"/>
@@ -3450,7 +3450,7 @@
             <a:r>
               <a:rPr lang="en-US" sz="1500" dirty="0">
                 <a:solidFill>
-                  <a:srgbClr val="1A1A1A"/>
+                  <a:srgbClr val="1E293B"/>
                 </a:solidFill>
                 <a:latin typeface="Arial" pitchFamily="34" charset="0"/>
                 <a:ea typeface="Arial" pitchFamily="34" charset="-122"/>
@@ -3489,7 +3489,7 @@
             <a:r>
               <a:rPr lang="en-US" sz="2200" b="1" dirty="0">
                 <a:solidFill>
-                  <a:srgbClr val="1A1A1A"/>
+                  <a:srgbClr val="1E293B"/>
                 </a:solidFill>
                 <a:latin typeface="Arial" pitchFamily="34" charset="0"/>
                 <a:ea typeface="Arial" pitchFamily="34" charset="-122"/>
@@ -3528,7 +3528,7 @@
             <a:r>
               <a:rPr lang="en-US" sz="1000" dirty="0">
                 <a:solidFill>
-                  <a:srgbClr val="6E6E6E"/>
+                  <a:srgbClr val="64748B"/>
                 </a:solidFill>
                 <a:latin typeface="Arial" pitchFamily="34" charset="0"/>
                 <a:ea typeface="Arial" pitchFamily="34" charset="-122"/>
@@ -3567,7 +3567,7 @@
             <a:r>
               <a:rPr lang="en-US" sz="1500" dirty="0">
                 <a:solidFill>
-                  <a:srgbClr val="1A1A1A"/>
+                  <a:srgbClr val="1E293B"/>
                 </a:solidFill>
                 <a:latin typeface="Arial" pitchFamily="34" charset="0"/>
                 <a:ea typeface="Arial" pitchFamily="34" charset="-122"/>
@@ -3606,7 +3606,7 @@
             <a:r>
               <a:rPr lang="en-US" sz="2200" b="1" dirty="0">
                 <a:solidFill>
-                  <a:srgbClr val="1A1A1A"/>
+                  <a:srgbClr val="1E293B"/>
                 </a:solidFill>
                 <a:latin typeface="Arial" pitchFamily="34" charset="0"/>
                 <a:ea typeface="Arial" pitchFamily="34" charset="-122"/>
@@ -3645,7 +3645,7 @@
             <a:r>
               <a:rPr lang="en-US" sz="1000" dirty="0">
                 <a:solidFill>
-                  <a:srgbClr val="6E6E6E"/>
+                  <a:srgbClr val="64748B"/>
                 </a:solidFill>
                 <a:latin typeface="Arial" pitchFamily="34" charset="0"/>
                 <a:ea typeface="Arial" pitchFamily="34" charset="-122"/>
@@ -3684,7 +3684,7 @@
             <a:r>
               <a:rPr lang="en-US" sz="1500" dirty="0">
                 <a:solidFill>
-                  <a:srgbClr val="1A1A1A"/>
+                  <a:srgbClr val="1E293B"/>
                 </a:solidFill>
                 <a:latin typeface="Arial" pitchFamily="34" charset="0"/>
                 <a:ea typeface="Arial" pitchFamily="34" charset="-122"/>
@@ -3723,7 +3723,7 @@
             <a:r>
               <a:rPr lang="en-US" sz="2200" b="1" dirty="0">
                 <a:solidFill>
-                  <a:srgbClr val="1A1A1A"/>
+                  <a:srgbClr val="1E293B"/>
                 </a:solidFill>
                 <a:latin typeface="Arial" pitchFamily="34" charset="0"/>
                 <a:ea typeface="Arial" pitchFamily="34" charset="-122"/>
@@ -3762,7 +3762,7 @@
             <a:r>
               <a:rPr lang="en-US" sz="1000" dirty="0">
                 <a:solidFill>
-                  <a:srgbClr val="6E6E6E"/>
+                  <a:srgbClr val="64748B"/>
                 </a:solidFill>
                 <a:latin typeface="Arial" pitchFamily="34" charset="0"/>
                 <a:ea typeface="Arial" pitchFamily="34" charset="-122"/>
@@ -3801,7 +3801,7 @@
             <a:r>
               <a:rPr lang="en-US" sz="1500" dirty="0">
                 <a:solidFill>
-                  <a:srgbClr val="1A1A1A"/>
+                  <a:srgbClr val="1E293B"/>
                 </a:solidFill>
                 <a:latin typeface="Arial" pitchFamily="34" charset="0"/>
                 <a:ea typeface="Arial" pitchFamily="34" charset="-122"/>
@@ -3840,7 +3840,7 @@
             <a:r>
               <a:rPr lang="en-US" sz="2200" b="1" dirty="0">
                 <a:solidFill>
-                  <a:srgbClr val="1A1A1A"/>
+                  <a:srgbClr val="1E293B"/>
                 </a:solidFill>
                 <a:latin typeface="Arial" pitchFamily="34" charset="0"/>
                 <a:ea typeface="Arial" pitchFamily="34" charset="-122"/>
@@ -3879,7 +3879,7 @@
             <a:r>
               <a:rPr lang="en-US" sz="1000" dirty="0">
                 <a:solidFill>
-                  <a:srgbClr val="6E6E6E"/>
+                  <a:srgbClr val="64748B"/>
                 </a:solidFill>
                 <a:latin typeface="Arial" pitchFamily="34" charset="0"/>
                 <a:ea typeface="Arial" pitchFamily="34" charset="-122"/>
@@ -3918,7 +3918,7 @@
             <a:r>
               <a:rPr lang="en-US" sz="1500" dirty="0">
                 <a:solidFill>
-                  <a:srgbClr val="1A1A1A"/>
+                  <a:srgbClr val="1E293B"/>
                 </a:solidFill>
                 <a:latin typeface="Arial" pitchFamily="34" charset="0"/>
                 <a:ea typeface="Arial" pitchFamily="34" charset="-122"/>
@@ -3957,7 +3957,7 @@
             <a:r>
               <a:rPr lang="en-US" sz="2200" b="1" dirty="0">
                 <a:solidFill>
-                  <a:srgbClr val="1A1A1A"/>
+                  <a:srgbClr val="1E293B"/>
                 </a:solidFill>
                 <a:latin typeface="Arial" pitchFamily="34" charset="0"/>
                 <a:ea typeface="Arial" pitchFamily="34" charset="-122"/>
@@ -3996,7 +3996,7 @@
             <a:r>
               <a:rPr lang="en-US" sz="1000" dirty="0">
                 <a:solidFill>
-                  <a:srgbClr val="6E6E6E"/>
+                  <a:srgbClr val="64748B"/>
                 </a:solidFill>
                 <a:latin typeface="Arial" pitchFamily="34" charset="0"/>
                 <a:ea typeface="Arial" pitchFamily="34" charset="-122"/>
@@ -4035,7 +4035,7 @@
             <a:r>
               <a:rPr lang="en-US" sz="1500" dirty="0">
                 <a:solidFill>
-                  <a:srgbClr val="1A1A1A"/>
+                  <a:srgbClr val="1E293B"/>
                 </a:solidFill>
                 <a:latin typeface="Arial" pitchFamily="34" charset="0"/>
                 <a:ea typeface="Arial" pitchFamily="34" charset="-122"/>
@@ -4061,7 +4061,7 @@
     <p:bg>
       <p:bgPr>
         <a:solidFill>
-          <a:srgbClr val="1A1A1A"/>
+          <a:srgbClr val="005AAA"/>
         </a:solidFill>
       </p:bgPr>
     </p:bg>
@@ -4106,7 +4106,7 @@
             <a:r>
               <a:rPr lang="en-US" sz="1200" spc="150" kern="0" dirty="0">
                 <a:solidFill>
-                  <a:srgbClr val="9E9E9E"/>
+                  <a:srgbClr val="A8C6E2"/>
                 </a:solidFill>
                 <a:latin typeface="Arial" pitchFamily="34" charset="0"/>
                 <a:ea typeface="Arial" pitchFamily="34" charset="-122"/>
@@ -4227,7 +4227,7 @@
             <a:r>
               <a:rPr lang="en-US" sz="1400" dirty="0">
                 <a:solidFill>
-                  <a:srgbClr val="C9C9C9"/>
+                  <a:srgbClr val="D6E6F2"/>
                 </a:solidFill>
                 <a:latin typeface="Arial" pitchFamily="34" charset="0"/>
                 <a:ea typeface="Arial" pitchFamily="34" charset="-122"/>
@@ -4298,7 +4298,7 @@
             <a:r>
               <a:rPr lang="en-US" sz="1200" spc="150" kern="0" dirty="0">
                 <a:solidFill>
-                  <a:srgbClr val="6E6E6E"/>
+                  <a:srgbClr val="64748B"/>
                 </a:solidFill>
                 <a:latin typeface="Arial" pitchFamily="34" charset="0"/>
                 <a:ea typeface="Arial" pitchFamily="34" charset="-122"/>
@@ -4337,7 +4337,7 @@
             <a:r>
               <a:rPr lang="en-US" sz="3000" b="1" dirty="0">
                 <a:solidFill>
-                  <a:srgbClr val="1A1A1A"/>
+                  <a:srgbClr val="005AAA"/>
                 </a:solidFill>
                 <a:latin typeface="Arial" pitchFamily="34" charset="0"/>
                 <a:ea typeface="Arial" pitchFamily="34" charset="-122"/>
@@ -4366,11 +4366,11 @@
             </a:avLst>
           </a:prstGeom>
           <a:solidFill>
-            <a:srgbClr val="F2F2F2"/>
+            <a:srgbClr val="F8FAFC"/>
           </a:solidFill>
-          <a:ln w="6350">
+          <a:ln w="9525">
             <a:solidFill>
-              <a:srgbClr val="B3B3B3"/>
+              <a:srgbClr val="CBD5E1"/>
             </a:solidFill>
             <a:prstDash val="solid"/>
           </a:ln>
@@ -4403,7 +4403,7 @@
             <a:r>
               <a:rPr lang="en-US" sz="2400" b="1" dirty="0">
                 <a:solidFill>
-                  <a:srgbClr val="6E6E6E"/>
+                  <a:srgbClr val="E70F47"/>
                 </a:solidFill>
                 <a:latin typeface="Arial" pitchFamily="34" charset="0"/>
                 <a:ea typeface="Arial" pitchFamily="34" charset="-122"/>
@@ -4442,7 +4442,7 @@
             <a:r>
               <a:rPr lang="en-US" sz="1500" b="1" dirty="0">
                 <a:solidFill>
-                  <a:srgbClr val="1A1A1A"/>
+                  <a:srgbClr val="1E293B"/>
                 </a:solidFill>
                 <a:latin typeface="Arial" pitchFamily="34" charset="0"/>
                 <a:ea typeface="Arial" pitchFamily="34" charset="-122"/>
@@ -4481,7 +4481,7 @@
             <a:r>
               <a:rPr lang="en-US" sz="1200" dirty="0">
                 <a:solidFill>
-                  <a:srgbClr val="6E6E6E"/>
+                  <a:srgbClr val="64748B"/>
                 </a:solidFill>
                 <a:latin typeface="Arial" pitchFamily="34" charset="0"/>
                 <a:ea typeface="Arial" pitchFamily="34" charset="-122"/>
@@ -4510,11 +4510,11 @@
             </a:avLst>
           </a:prstGeom>
           <a:solidFill>
-            <a:srgbClr val="F2F2F2"/>
+            <a:srgbClr val="F8FAFC"/>
           </a:solidFill>
-          <a:ln w="6350">
+          <a:ln w="9525">
             <a:solidFill>
-              <a:srgbClr val="B3B3B3"/>
+              <a:srgbClr val="CBD5E1"/>
             </a:solidFill>
             <a:prstDash val="solid"/>
           </a:ln>
@@ -4547,7 +4547,7 @@
             <a:r>
               <a:rPr lang="en-US" sz="2400" b="1" dirty="0">
                 <a:solidFill>
-                  <a:srgbClr val="6E6E6E"/>
+                  <a:srgbClr val="E70F47"/>
                 </a:solidFill>
                 <a:latin typeface="Arial" pitchFamily="34" charset="0"/>
                 <a:ea typeface="Arial" pitchFamily="34" charset="-122"/>
@@ -4586,7 +4586,7 @@
             <a:r>
               <a:rPr lang="en-US" sz="1500" b="1" dirty="0">
                 <a:solidFill>
-                  <a:srgbClr val="1A1A1A"/>
+                  <a:srgbClr val="1E293B"/>
                 </a:solidFill>
                 <a:latin typeface="Arial" pitchFamily="34" charset="0"/>
                 <a:ea typeface="Arial" pitchFamily="34" charset="-122"/>
@@ -4625,7 +4625,7 @@
             <a:r>
               <a:rPr lang="en-US" sz="1200" dirty="0">
                 <a:solidFill>
-                  <a:srgbClr val="6E6E6E"/>
+                  <a:srgbClr val="64748B"/>
                 </a:solidFill>
                 <a:latin typeface="Arial" pitchFamily="34" charset="0"/>
                 <a:ea typeface="Arial" pitchFamily="34" charset="-122"/>
@@ -4654,11 +4654,11 @@
             </a:avLst>
           </a:prstGeom>
           <a:solidFill>
-            <a:srgbClr val="F2F2F2"/>
+            <a:srgbClr val="F8FAFC"/>
           </a:solidFill>
-          <a:ln w="6350">
+          <a:ln w="9525">
             <a:solidFill>
-              <a:srgbClr val="B3B3B3"/>
+              <a:srgbClr val="CBD5E1"/>
             </a:solidFill>
             <a:prstDash val="solid"/>
           </a:ln>
@@ -4691,7 +4691,7 @@
             <a:r>
               <a:rPr lang="en-US" sz="2400" b="1" dirty="0">
                 <a:solidFill>
-                  <a:srgbClr val="6E6E6E"/>
+                  <a:srgbClr val="E70F47"/>
                 </a:solidFill>
                 <a:latin typeface="Arial" pitchFamily="34" charset="0"/>
                 <a:ea typeface="Arial" pitchFamily="34" charset="-122"/>
@@ -4730,7 +4730,7 @@
             <a:r>
               <a:rPr lang="en-US" sz="1500" b="1" dirty="0">
                 <a:solidFill>
-                  <a:srgbClr val="1A1A1A"/>
+                  <a:srgbClr val="1E293B"/>
                 </a:solidFill>
                 <a:latin typeface="Arial" pitchFamily="34" charset="0"/>
                 <a:ea typeface="Arial" pitchFamily="34" charset="-122"/>
@@ -4769,7 +4769,7 @@
             <a:r>
               <a:rPr lang="en-US" sz="1200" dirty="0">
                 <a:solidFill>
-                  <a:srgbClr val="6E6E6E"/>
+                  <a:srgbClr val="64748B"/>
                 </a:solidFill>
                 <a:latin typeface="Arial" pitchFamily="34" charset="0"/>
                 <a:ea typeface="Arial" pitchFamily="34" charset="-122"/>
@@ -4798,11 +4798,11 @@
             </a:avLst>
           </a:prstGeom>
           <a:solidFill>
-            <a:srgbClr val="F2F2F2"/>
+            <a:srgbClr val="F8FAFC"/>
           </a:solidFill>
-          <a:ln w="6350">
+          <a:ln w="9525">
             <a:solidFill>
-              <a:srgbClr val="B3B3B3"/>
+              <a:srgbClr val="CBD5E1"/>
             </a:solidFill>
             <a:prstDash val="solid"/>
           </a:ln>
@@ -4835,7 +4835,7 @@
             <a:r>
               <a:rPr lang="en-US" sz="2400" b="1" dirty="0">
                 <a:solidFill>
-                  <a:srgbClr val="6E6E6E"/>
+                  <a:srgbClr val="E70F47"/>
                 </a:solidFill>
                 <a:latin typeface="Arial" pitchFamily="34" charset="0"/>
                 <a:ea typeface="Arial" pitchFamily="34" charset="-122"/>
@@ -4874,7 +4874,7 @@
             <a:r>
               <a:rPr lang="en-US" sz="1500" b="1" dirty="0">
                 <a:solidFill>
-                  <a:srgbClr val="1A1A1A"/>
+                  <a:srgbClr val="1E293B"/>
                 </a:solidFill>
                 <a:latin typeface="Arial" pitchFamily="34" charset="0"/>
                 <a:ea typeface="Arial" pitchFamily="34" charset="-122"/>
@@ -4913,7 +4913,7 @@
             <a:r>
               <a:rPr lang="en-US" sz="1200" dirty="0">
                 <a:solidFill>
-                  <a:srgbClr val="6E6E6E"/>
+                  <a:srgbClr val="64748B"/>
                 </a:solidFill>
                 <a:latin typeface="Arial" pitchFamily="34" charset="0"/>
                 <a:ea typeface="Arial" pitchFamily="34" charset="-122"/>
@@ -4984,7 +4984,7 @@
             <a:r>
               <a:rPr lang="en-US" sz="1200" spc="150" kern="0" dirty="0">
                 <a:solidFill>
-                  <a:srgbClr val="6E6E6E"/>
+                  <a:srgbClr val="64748B"/>
                 </a:solidFill>
                 <a:latin typeface="Arial" pitchFamily="34" charset="0"/>
                 <a:ea typeface="Arial" pitchFamily="34" charset="-122"/>
@@ -5023,7 +5023,7 @@
             <a:r>
               <a:rPr lang="en-US" sz="3000" b="1" dirty="0">
                 <a:solidFill>
-                  <a:srgbClr val="1A1A1A"/>
+                  <a:srgbClr val="005AAA"/>
                 </a:solidFill>
                 <a:latin typeface="Arial" pitchFamily="34" charset="0"/>
                 <a:ea typeface="Arial" pitchFamily="34" charset="-122"/>
@@ -5082,7 +5082,7 @@
                   <a:tcPr marL="91440" marR="91440" marT="45720" marB="45720" anchor="ctr">
                     <a:lnL w="6350" cap="flat" cmpd="sng" algn="ctr">
                       <a:solidFill>
-                        <a:srgbClr val="B3B3B3"/>
+                        <a:srgbClr val="CBD5E1"/>
                       </a:solidFill>
                       <a:prstDash val="solid"/>
                       <a:round/>
@@ -5091,7 +5091,7 @@
                     </a:lnL>
                     <a:lnR w="6350" cap="flat" cmpd="sng" algn="ctr">
                       <a:solidFill>
-                        <a:srgbClr val="B3B3B3"/>
+                        <a:srgbClr val="CBD5E1"/>
                       </a:solidFill>
                       <a:prstDash val="solid"/>
                       <a:round/>
@@ -5100,7 +5100,7 @@
                     </a:lnR>
                     <a:lnT w="6350" cap="flat" cmpd="sng" algn="ctr">
                       <a:solidFill>
-                        <a:srgbClr val="B3B3B3"/>
+                        <a:srgbClr val="CBD5E1"/>
                       </a:solidFill>
                       <a:prstDash val="solid"/>
                       <a:round/>
@@ -5109,7 +5109,7 @@
                     </a:lnT>
                     <a:lnB w="6350" cap="flat" cmpd="sng" algn="ctr">
                       <a:solidFill>
-                        <a:srgbClr val="B3B3B3"/>
+                        <a:srgbClr val="CBD5E1"/>
                       </a:solidFill>
                       <a:prstDash val="solid"/>
                       <a:round/>
@@ -5150,7 +5150,7 @@
                   <a:tcPr marL="91440" marR="91440" marT="45720" marB="45720" anchor="ctr">
                     <a:lnL w="6350" cap="flat" cmpd="sng" algn="ctr">
                       <a:solidFill>
-                        <a:srgbClr val="B3B3B3"/>
+                        <a:srgbClr val="CBD5E1"/>
                       </a:solidFill>
                       <a:prstDash val="solid"/>
                       <a:round/>
@@ -5159,7 +5159,7 @@
                     </a:lnL>
                     <a:lnR w="6350" cap="flat" cmpd="sng" algn="ctr">
                       <a:solidFill>
-                        <a:srgbClr val="B3B3B3"/>
+                        <a:srgbClr val="CBD5E1"/>
                       </a:solidFill>
                       <a:prstDash val="solid"/>
                       <a:round/>
@@ -5168,7 +5168,7 @@
                     </a:lnR>
                     <a:lnT w="6350" cap="flat" cmpd="sng" algn="ctr">
                       <a:solidFill>
-                        <a:srgbClr val="B3B3B3"/>
+                        <a:srgbClr val="CBD5E1"/>
                       </a:solidFill>
                       <a:prstDash val="solid"/>
                       <a:round/>
@@ -5177,7 +5177,7 @@
                     </a:lnT>
                     <a:lnB w="6350" cap="flat" cmpd="sng" algn="ctr">
                       <a:solidFill>
-                        <a:srgbClr val="B3B3B3"/>
+                        <a:srgbClr val="CBD5E1"/>
                       </a:solidFill>
                       <a:prstDash val="solid"/>
                       <a:round/>
@@ -5185,7 +5185,7 @@
                       <a:tailEnd type="none" w="med" len="med"/>
                     </a:lnB>
                     <a:solidFill>
-                      <a:srgbClr val="1A1A1A"/>
+                      <a:srgbClr val="005AAA"/>
                     </a:solidFill>
                   </a:tcPr>
                 </a:tc>
@@ -5218,7 +5218,7 @@
                   <a:tcPr marL="91440" marR="91440" marT="45720" marB="45720" anchor="ctr">
                     <a:lnL w="6350" cap="flat" cmpd="sng" algn="ctr">
                       <a:solidFill>
-                        <a:srgbClr val="B3B3B3"/>
+                        <a:srgbClr val="CBD5E1"/>
                       </a:solidFill>
                       <a:prstDash val="solid"/>
                       <a:round/>
@@ -5227,7 +5227,7 @@
                     </a:lnL>
                     <a:lnR w="6350" cap="flat" cmpd="sng" algn="ctr">
                       <a:solidFill>
-                        <a:srgbClr val="B3B3B3"/>
+                        <a:srgbClr val="CBD5E1"/>
                       </a:solidFill>
                       <a:prstDash val="solid"/>
                       <a:round/>
@@ -5236,7 +5236,7 @@
                     </a:lnR>
                     <a:lnT w="6350" cap="flat" cmpd="sng" algn="ctr">
                       <a:solidFill>
-                        <a:srgbClr val="B3B3B3"/>
+                        <a:srgbClr val="CBD5E1"/>
                       </a:solidFill>
                       <a:prstDash val="solid"/>
                       <a:round/>
@@ -5245,7 +5245,7 @@
                     </a:lnT>
                     <a:lnB w="6350" cap="flat" cmpd="sng" algn="ctr">
                       <a:solidFill>
-                        <a:srgbClr val="B3B3B3"/>
+                        <a:srgbClr val="CBD5E1"/>
                       </a:solidFill>
                       <a:prstDash val="solid"/>
                       <a:round/>
@@ -5253,7 +5253,7 @@
                       <a:tailEnd type="none" w="med" len="med"/>
                     </a:lnB>
                     <a:solidFill>
-                      <a:srgbClr val="5A5A5A"/>
+                      <a:srgbClr val="4A7FB5"/>
                     </a:solidFill>
                   </a:tcPr>
                 </a:tc>
@@ -5286,7 +5286,7 @@
                   <a:tcPr marL="91440" marR="91440" marT="45720" marB="45720" anchor="ctr">
                     <a:lnL w="6350" cap="flat" cmpd="sng" algn="ctr">
                       <a:solidFill>
-                        <a:srgbClr val="B3B3B3"/>
+                        <a:srgbClr val="CBD5E1"/>
                       </a:solidFill>
                       <a:prstDash val="solid"/>
                       <a:round/>
@@ -5295,7 +5295,7 @@
                     </a:lnL>
                     <a:lnR w="6350" cap="flat" cmpd="sng" algn="ctr">
                       <a:solidFill>
-                        <a:srgbClr val="B3B3B3"/>
+                        <a:srgbClr val="CBD5E1"/>
                       </a:solidFill>
                       <a:prstDash val="solid"/>
                       <a:round/>
@@ -5304,7 +5304,7 @@
                     </a:lnR>
                     <a:lnT w="6350" cap="flat" cmpd="sng" algn="ctr">
                       <a:solidFill>
-                        <a:srgbClr val="B3B3B3"/>
+                        <a:srgbClr val="CBD5E1"/>
                       </a:solidFill>
                       <a:prstDash val="solid"/>
                       <a:round/>
@@ -5313,7 +5313,7 @@
                     </a:lnT>
                     <a:lnB w="6350" cap="flat" cmpd="sng" algn="ctr">
                       <a:solidFill>
-                        <a:srgbClr val="B3B3B3"/>
+                        <a:srgbClr val="CBD5E1"/>
                       </a:solidFill>
                       <a:prstDash val="solid"/>
                       <a:round/>
@@ -5321,7 +5321,7 @@
                       <a:tailEnd type="none" w="med" len="med"/>
                     </a:lnB>
                     <a:solidFill>
-                      <a:srgbClr val="5A5A5A"/>
+                      <a:srgbClr val="4A7FB5"/>
                     </a:solidFill>
                   </a:tcPr>
                 </a:tc>
@@ -5338,7 +5338,7 @@
                       <a:r>
                         <a:rPr lang="en-US" sz="1300" dirty="0">
                           <a:solidFill>
-                            <a:srgbClr val="1A1A1A"/>
+                            <a:srgbClr val="1E293B"/>
                           </a:solidFill>
                           <a:latin typeface="Arial" pitchFamily="34" charset="0"/>
                           <a:ea typeface="Arial" pitchFamily="34" charset="-122"/>
@@ -5356,7 +5356,7 @@
                   <a:tcPr marL="91440" marR="91440" marT="45720" marB="45720" anchor="ctr">
                     <a:lnL w="6350" cap="flat" cmpd="sng" algn="ctr">
                       <a:solidFill>
-                        <a:srgbClr val="B3B3B3"/>
+                        <a:srgbClr val="CBD5E1"/>
                       </a:solidFill>
                       <a:prstDash val="solid"/>
                       <a:round/>
@@ -5365,7 +5365,7 @@
                     </a:lnL>
                     <a:lnR w="6350" cap="flat" cmpd="sng" algn="ctr">
                       <a:solidFill>
-                        <a:srgbClr val="B3B3B3"/>
+                        <a:srgbClr val="CBD5E1"/>
                       </a:solidFill>
                       <a:prstDash val="solid"/>
                       <a:round/>
@@ -5374,7 +5374,7 @@
                     </a:lnR>
                     <a:lnT w="6350" cap="flat" cmpd="sng" algn="ctr">
                       <a:solidFill>
-                        <a:srgbClr val="B3B3B3"/>
+                        <a:srgbClr val="CBD5E1"/>
                       </a:solidFill>
                       <a:prstDash val="solid"/>
                       <a:round/>
@@ -5383,7 +5383,7 @@
                     </a:lnT>
                     <a:lnB w="6350" cap="flat" cmpd="sng" algn="ctr">
                       <a:solidFill>
-                        <a:srgbClr val="B3B3B3"/>
+                        <a:srgbClr val="CBD5E1"/>
                       </a:solidFill>
                       <a:prstDash val="solid"/>
                       <a:round/>
@@ -5403,7 +5403,7 @@
                       <a:r>
                         <a:rPr lang="en-US" sz="1300" dirty="0">
                           <a:solidFill>
-                            <a:srgbClr val="1A1A1A"/>
+                            <a:srgbClr val="1E293B"/>
                           </a:solidFill>
                           <a:latin typeface="Arial" pitchFamily="34" charset="0"/>
                           <a:ea typeface="Arial" pitchFamily="34" charset="-122"/>
@@ -5421,7 +5421,7 @@
                   <a:tcPr marL="91440" marR="91440" marT="45720" marB="45720" anchor="ctr">
                     <a:lnL w="6350" cap="flat" cmpd="sng" algn="ctr">
                       <a:solidFill>
-                        <a:srgbClr val="B3B3B3"/>
+                        <a:srgbClr val="CBD5E1"/>
                       </a:solidFill>
                       <a:prstDash val="solid"/>
                       <a:round/>
@@ -5430,7 +5430,7 @@
                     </a:lnL>
                     <a:lnR w="6350" cap="flat" cmpd="sng" algn="ctr">
                       <a:solidFill>
-                        <a:srgbClr val="B3B3B3"/>
+                        <a:srgbClr val="CBD5E1"/>
                       </a:solidFill>
                       <a:prstDash val="solid"/>
                       <a:round/>
@@ -5439,7 +5439,7 @@
                     </a:lnR>
                     <a:lnT w="6350" cap="flat" cmpd="sng" algn="ctr">
                       <a:solidFill>
-                        <a:srgbClr val="B3B3B3"/>
+                        <a:srgbClr val="CBD5E1"/>
                       </a:solidFill>
                       <a:prstDash val="solid"/>
                       <a:round/>
@@ -5448,7 +5448,7 @@
                     </a:lnT>
                     <a:lnB w="6350" cap="flat" cmpd="sng" algn="ctr">
                       <a:solidFill>
-                        <a:srgbClr val="B3B3B3"/>
+                        <a:srgbClr val="CBD5E1"/>
                       </a:solidFill>
                       <a:prstDash val="solid"/>
                       <a:round/>
@@ -5468,7 +5468,7 @@
                       <a:r>
                         <a:rPr lang="en-US" sz="1300" dirty="0">
                           <a:solidFill>
-                            <a:srgbClr val="1A1A1A"/>
+                            <a:srgbClr val="1E293B"/>
                           </a:solidFill>
                           <a:latin typeface="Arial" pitchFamily="34" charset="0"/>
                           <a:ea typeface="Arial" pitchFamily="34" charset="-122"/>
@@ -5486,7 +5486,7 @@
                   <a:tcPr marL="91440" marR="91440" marT="45720" marB="45720" anchor="ctr">
                     <a:lnL w="6350" cap="flat" cmpd="sng" algn="ctr">
                       <a:solidFill>
-                        <a:srgbClr val="B3B3B3"/>
+                        <a:srgbClr val="CBD5E1"/>
                       </a:solidFill>
                       <a:prstDash val="solid"/>
                       <a:round/>
@@ -5495,7 +5495,7 @@
                     </a:lnL>
                     <a:lnR w="6350" cap="flat" cmpd="sng" algn="ctr">
                       <a:solidFill>
-                        <a:srgbClr val="B3B3B3"/>
+                        <a:srgbClr val="CBD5E1"/>
                       </a:solidFill>
                       <a:prstDash val="solid"/>
                       <a:round/>
@@ -5504,7 +5504,7 @@
                     </a:lnR>
                     <a:lnT w="6350" cap="flat" cmpd="sng" algn="ctr">
                       <a:solidFill>
-                        <a:srgbClr val="B3B3B3"/>
+                        <a:srgbClr val="CBD5E1"/>
                       </a:solidFill>
                       <a:prstDash val="solid"/>
                       <a:round/>
@@ -5513,7 +5513,7 @@
                     </a:lnT>
                     <a:lnB w="6350" cap="flat" cmpd="sng" algn="ctr">
                       <a:solidFill>
-                        <a:srgbClr val="B3B3B3"/>
+                        <a:srgbClr val="CBD5E1"/>
                       </a:solidFill>
                       <a:prstDash val="solid"/>
                       <a:round/>
@@ -5533,7 +5533,7 @@
                       <a:r>
                         <a:rPr lang="en-US" sz="1300" dirty="0">
                           <a:solidFill>
-                            <a:srgbClr val="1A1A1A"/>
+                            <a:srgbClr val="1E293B"/>
                           </a:solidFill>
                           <a:latin typeface="Arial" pitchFamily="34" charset="0"/>
                           <a:ea typeface="Arial" pitchFamily="34" charset="-122"/>
@@ -5551,7 +5551,7 @@
                   <a:tcPr marL="91440" marR="91440" marT="45720" marB="45720" anchor="ctr">
                     <a:lnL w="6350" cap="flat" cmpd="sng" algn="ctr">
                       <a:solidFill>
-                        <a:srgbClr val="B3B3B3"/>
+                        <a:srgbClr val="CBD5E1"/>
                       </a:solidFill>
                       <a:prstDash val="solid"/>
                       <a:round/>
@@ -5560,7 +5560,7 @@
                     </a:lnL>
                     <a:lnR w="6350" cap="flat" cmpd="sng" algn="ctr">
                       <a:solidFill>
-                        <a:srgbClr val="B3B3B3"/>
+                        <a:srgbClr val="CBD5E1"/>
                       </a:solidFill>
                       <a:prstDash val="solid"/>
                       <a:round/>
@@ -5569,7 +5569,7 @@
                     </a:lnR>
                     <a:lnT w="6350" cap="flat" cmpd="sng" algn="ctr">
                       <a:solidFill>
-                        <a:srgbClr val="B3B3B3"/>
+                        <a:srgbClr val="CBD5E1"/>
                       </a:solidFill>
                       <a:prstDash val="solid"/>
                       <a:round/>
@@ -5578,7 +5578,7 @@
                     </a:lnT>
                     <a:lnB w="6350" cap="flat" cmpd="sng" algn="ctr">
                       <a:solidFill>
-                        <a:srgbClr val="B3B3B3"/>
+                        <a:srgbClr val="CBD5E1"/>
                       </a:solidFill>
                       <a:prstDash val="solid"/>
                       <a:round/>
@@ -5600,7 +5600,7 @@
                       <a:r>
                         <a:rPr lang="en-US" sz="1300" dirty="0">
                           <a:solidFill>
-                            <a:srgbClr val="1A1A1A"/>
+                            <a:srgbClr val="1E293B"/>
                           </a:solidFill>
                           <a:latin typeface="Arial" pitchFamily="34" charset="0"/>
                           <a:ea typeface="Arial" pitchFamily="34" charset="-122"/>
@@ -5618,7 +5618,7 @@
                   <a:tcPr marL="91440" marR="91440" marT="45720" marB="45720" anchor="ctr">
                     <a:lnL w="6350" cap="flat" cmpd="sng" algn="ctr">
                       <a:solidFill>
-                        <a:srgbClr val="B3B3B3"/>
+                        <a:srgbClr val="CBD5E1"/>
                       </a:solidFill>
                       <a:prstDash val="solid"/>
                       <a:round/>
@@ -5627,7 +5627,7 @@
                     </a:lnL>
                     <a:lnR w="6350" cap="flat" cmpd="sng" algn="ctr">
                       <a:solidFill>
-                        <a:srgbClr val="B3B3B3"/>
+                        <a:srgbClr val="CBD5E1"/>
                       </a:solidFill>
                       <a:prstDash val="solid"/>
                       <a:round/>
@@ -5636,7 +5636,7 @@
                     </a:lnR>
                     <a:lnT w="6350" cap="flat" cmpd="sng" algn="ctr">
                       <a:solidFill>
-                        <a:srgbClr val="B3B3B3"/>
+                        <a:srgbClr val="CBD5E1"/>
                       </a:solidFill>
                       <a:prstDash val="solid"/>
                       <a:round/>
@@ -5645,7 +5645,7 @@
                     </a:lnT>
                     <a:lnB w="6350" cap="flat" cmpd="sng" algn="ctr">
                       <a:solidFill>
-                        <a:srgbClr val="B3B3B3"/>
+                        <a:srgbClr val="CBD5E1"/>
                       </a:solidFill>
                       <a:prstDash val="solid"/>
                       <a:round/>
@@ -5665,7 +5665,7 @@
                       <a:r>
                         <a:rPr lang="en-US" sz="1300" dirty="0">
                           <a:solidFill>
-                            <a:srgbClr val="1A1A1A"/>
+                            <a:srgbClr val="1E293B"/>
                           </a:solidFill>
                           <a:latin typeface="Arial" pitchFamily="34" charset="0"/>
                           <a:ea typeface="Arial" pitchFamily="34" charset="-122"/>
@@ -5683,7 +5683,7 @@
                   <a:tcPr marL="91440" marR="91440" marT="45720" marB="45720" anchor="ctr">
                     <a:lnL w="6350" cap="flat" cmpd="sng" algn="ctr">
                       <a:solidFill>
-                        <a:srgbClr val="B3B3B3"/>
+                        <a:srgbClr val="CBD5E1"/>
                       </a:solidFill>
                       <a:prstDash val="solid"/>
                       <a:round/>
@@ -5692,7 +5692,7 @@
                     </a:lnL>
                     <a:lnR w="6350" cap="flat" cmpd="sng" algn="ctr">
                       <a:solidFill>
-                        <a:srgbClr val="B3B3B3"/>
+                        <a:srgbClr val="CBD5E1"/>
                       </a:solidFill>
                       <a:prstDash val="solid"/>
                       <a:round/>
@@ -5701,7 +5701,7 @@
                     </a:lnR>
                     <a:lnT w="6350" cap="flat" cmpd="sng" algn="ctr">
                       <a:solidFill>
-                        <a:srgbClr val="B3B3B3"/>
+                        <a:srgbClr val="CBD5E1"/>
                       </a:solidFill>
                       <a:prstDash val="solid"/>
                       <a:round/>
@@ -5710,7 +5710,7 @@
                     </a:lnT>
                     <a:lnB w="6350" cap="flat" cmpd="sng" algn="ctr">
                       <a:solidFill>
-                        <a:srgbClr val="B3B3B3"/>
+                        <a:srgbClr val="CBD5E1"/>
                       </a:solidFill>
                       <a:prstDash val="solid"/>
                       <a:round/>
@@ -5730,7 +5730,7 @@
                       <a:r>
                         <a:rPr lang="en-US" sz="1300" dirty="0">
                           <a:solidFill>
-                            <a:srgbClr val="1A1A1A"/>
+                            <a:srgbClr val="1E293B"/>
                           </a:solidFill>
                           <a:latin typeface="Arial" pitchFamily="34" charset="0"/>
                           <a:ea typeface="Arial" pitchFamily="34" charset="-122"/>
@@ -5748,7 +5748,7 @@
                   <a:tcPr marL="91440" marR="91440" marT="45720" marB="45720" anchor="ctr">
                     <a:lnL w="6350" cap="flat" cmpd="sng" algn="ctr">
                       <a:solidFill>
-                        <a:srgbClr val="B3B3B3"/>
+                        <a:srgbClr val="CBD5E1"/>
                       </a:solidFill>
                       <a:prstDash val="solid"/>
                       <a:round/>
@@ -5757,7 +5757,7 @@
                     </a:lnL>
                     <a:lnR w="6350" cap="flat" cmpd="sng" algn="ctr">
                       <a:solidFill>
-                        <a:srgbClr val="B3B3B3"/>
+                        <a:srgbClr val="CBD5E1"/>
                       </a:solidFill>
                       <a:prstDash val="solid"/>
                       <a:round/>
@@ -5766,7 +5766,7 @@
                     </a:lnR>
                     <a:lnT w="6350" cap="flat" cmpd="sng" algn="ctr">
                       <a:solidFill>
-                        <a:srgbClr val="B3B3B3"/>
+                        <a:srgbClr val="CBD5E1"/>
                       </a:solidFill>
                       <a:prstDash val="solid"/>
                       <a:round/>
@@ -5775,7 +5775,7 @@
                     </a:lnT>
                     <a:lnB w="6350" cap="flat" cmpd="sng" algn="ctr">
                       <a:solidFill>
-                        <a:srgbClr val="B3B3B3"/>
+                        <a:srgbClr val="CBD5E1"/>
                       </a:solidFill>
                       <a:prstDash val="solid"/>
                       <a:round/>
@@ -5795,7 +5795,7 @@
                       <a:r>
                         <a:rPr lang="en-US" sz="1300" dirty="0">
                           <a:solidFill>
-                            <a:srgbClr val="1A1A1A"/>
+                            <a:srgbClr val="1E293B"/>
                           </a:solidFill>
                           <a:latin typeface="Arial" pitchFamily="34" charset="0"/>
                           <a:ea typeface="Arial" pitchFamily="34" charset="-122"/>
@@ -5813,7 +5813,7 @@
                   <a:tcPr marL="91440" marR="91440" marT="45720" marB="45720" anchor="ctr">
                     <a:lnL w="6350" cap="flat" cmpd="sng" algn="ctr">
                       <a:solidFill>
-                        <a:srgbClr val="B3B3B3"/>
+                        <a:srgbClr val="CBD5E1"/>
                       </a:solidFill>
                       <a:prstDash val="solid"/>
                       <a:round/>
@@ -5822,7 +5822,7 @@
                     </a:lnL>
                     <a:lnR w="6350" cap="flat" cmpd="sng" algn="ctr">
                       <a:solidFill>
-                        <a:srgbClr val="B3B3B3"/>
+                        <a:srgbClr val="CBD5E1"/>
                       </a:solidFill>
                       <a:prstDash val="solid"/>
                       <a:round/>
@@ -5831,7 +5831,7 @@
                     </a:lnR>
                     <a:lnT w="6350" cap="flat" cmpd="sng" algn="ctr">
                       <a:solidFill>
-                        <a:srgbClr val="B3B3B3"/>
+                        <a:srgbClr val="CBD5E1"/>
                       </a:solidFill>
                       <a:prstDash val="solid"/>
                       <a:round/>
@@ -5840,7 +5840,7 @@
                     </a:lnT>
                     <a:lnB w="6350" cap="flat" cmpd="sng" algn="ctr">
                       <a:solidFill>
-                        <a:srgbClr val="B3B3B3"/>
+                        <a:srgbClr val="CBD5E1"/>
                       </a:solidFill>
                       <a:prstDash val="solid"/>
                       <a:round/>
@@ -5862,7 +5862,7 @@
                       <a:r>
                         <a:rPr lang="en-US" sz="1300" dirty="0">
                           <a:solidFill>
-                            <a:srgbClr val="1A1A1A"/>
+                            <a:srgbClr val="1E293B"/>
                           </a:solidFill>
                           <a:latin typeface="Arial" pitchFamily="34" charset="0"/>
                           <a:ea typeface="Arial" pitchFamily="34" charset="-122"/>
@@ -5880,7 +5880,7 @@
                   <a:tcPr marL="91440" marR="91440" marT="45720" marB="45720" anchor="ctr">
                     <a:lnL w="6350" cap="flat" cmpd="sng" algn="ctr">
                       <a:solidFill>
-                        <a:srgbClr val="B3B3B3"/>
+                        <a:srgbClr val="CBD5E1"/>
                       </a:solidFill>
                       <a:prstDash val="solid"/>
                       <a:round/>
@@ -5889,7 +5889,7 @@
                     </a:lnL>
                     <a:lnR w="6350" cap="flat" cmpd="sng" algn="ctr">
                       <a:solidFill>
-                        <a:srgbClr val="B3B3B3"/>
+                        <a:srgbClr val="CBD5E1"/>
                       </a:solidFill>
                       <a:prstDash val="solid"/>
                       <a:round/>
@@ -5898,7 +5898,7 @@
                     </a:lnR>
                     <a:lnT w="6350" cap="flat" cmpd="sng" algn="ctr">
                       <a:solidFill>
-                        <a:srgbClr val="B3B3B3"/>
+                        <a:srgbClr val="CBD5E1"/>
                       </a:solidFill>
                       <a:prstDash val="solid"/>
                       <a:round/>
@@ -5907,7 +5907,7 @@
                     </a:lnT>
                     <a:lnB w="6350" cap="flat" cmpd="sng" algn="ctr">
                       <a:solidFill>
-                        <a:srgbClr val="B3B3B3"/>
+                        <a:srgbClr val="CBD5E1"/>
                       </a:solidFill>
                       <a:prstDash val="solid"/>
                       <a:round/>
@@ -5927,7 +5927,7 @@
                       <a:r>
                         <a:rPr lang="en-US" sz="1300" dirty="0">
                           <a:solidFill>
-                            <a:srgbClr val="1A1A1A"/>
+                            <a:srgbClr val="1E293B"/>
                           </a:solidFill>
                           <a:latin typeface="Arial" pitchFamily="34" charset="0"/>
                           <a:ea typeface="Arial" pitchFamily="34" charset="-122"/>
@@ -5945,7 +5945,7 @@
                   <a:tcPr marL="91440" marR="91440" marT="45720" marB="45720" anchor="ctr">
                     <a:lnL w="6350" cap="flat" cmpd="sng" algn="ctr">
                       <a:solidFill>
-                        <a:srgbClr val="B3B3B3"/>
+                        <a:srgbClr val="CBD5E1"/>
                       </a:solidFill>
                       <a:prstDash val="solid"/>
                       <a:round/>
@@ -5954,7 +5954,7 @@
                     </a:lnL>
                     <a:lnR w="6350" cap="flat" cmpd="sng" algn="ctr">
                       <a:solidFill>
-                        <a:srgbClr val="B3B3B3"/>
+                        <a:srgbClr val="CBD5E1"/>
                       </a:solidFill>
                       <a:prstDash val="solid"/>
                       <a:round/>
@@ -5963,7 +5963,7 @@
                     </a:lnR>
                     <a:lnT w="6350" cap="flat" cmpd="sng" algn="ctr">
                       <a:solidFill>
-                        <a:srgbClr val="B3B3B3"/>
+                        <a:srgbClr val="CBD5E1"/>
                       </a:solidFill>
                       <a:prstDash val="solid"/>
                       <a:round/>
@@ -5972,7 +5972,7 @@
                     </a:lnT>
                     <a:lnB w="6350" cap="flat" cmpd="sng" algn="ctr">
                       <a:solidFill>
-                        <a:srgbClr val="B3B3B3"/>
+                        <a:srgbClr val="CBD5E1"/>
                       </a:solidFill>
                       <a:prstDash val="solid"/>
                       <a:round/>
@@ -5992,7 +5992,7 @@
                       <a:r>
                         <a:rPr lang="en-US" sz="1300" dirty="0">
                           <a:solidFill>
-                            <a:srgbClr val="1A1A1A"/>
+                            <a:srgbClr val="1E293B"/>
                           </a:solidFill>
                           <a:latin typeface="Arial" pitchFamily="34" charset="0"/>
                           <a:ea typeface="Arial" pitchFamily="34" charset="-122"/>
@@ -6010,7 +6010,7 @@
                   <a:tcPr marL="91440" marR="91440" marT="45720" marB="45720" anchor="ctr">
                     <a:lnL w="6350" cap="flat" cmpd="sng" algn="ctr">
                       <a:solidFill>
-                        <a:srgbClr val="B3B3B3"/>
+                        <a:srgbClr val="CBD5E1"/>
                       </a:solidFill>
                       <a:prstDash val="solid"/>
                       <a:round/>
@@ -6019,7 +6019,7 @@
                     </a:lnL>
                     <a:lnR w="6350" cap="flat" cmpd="sng" algn="ctr">
                       <a:solidFill>
-                        <a:srgbClr val="B3B3B3"/>
+                        <a:srgbClr val="CBD5E1"/>
                       </a:solidFill>
                       <a:prstDash val="solid"/>
                       <a:round/>
@@ -6028,7 +6028,7 @@
                     </a:lnR>
                     <a:lnT w="6350" cap="flat" cmpd="sng" algn="ctr">
                       <a:solidFill>
-                        <a:srgbClr val="B3B3B3"/>
+                        <a:srgbClr val="CBD5E1"/>
                       </a:solidFill>
                       <a:prstDash val="solid"/>
                       <a:round/>
@@ -6037,7 +6037,7 @@
                     </a:lnT>
                     <a:lnB w="6350" cap="flat" cmpd="sng" algn="ctr">
                       <a:solidFill>
-                        <a:srgbClr val="B3B3B3"/>
+                        <a:srgbClr val="CBD5E1"/>
                       </a:solidFill>
                       <a:prstDash val="solid"/>
                       <a:round/>
@@ -6057,7 +6057,7 @@
                       <a:r>
                         <a:rPr lang="en-US" sz="1300" dirty="0">
                           <a:solidFill>
-                            <a:srgbClr val="1A1A1A"/>
+                            <a:srgbClr val="1E293B"/>
                           </a:solidFill>
                           <a:latin typeface="Arial" pitchFamily="34" charset="0"/>
                           <a:ea typeface="Arial" pitchFamily="34" charset="-122"/>
@@ -6075,7 +6075,7 @@
                   <a:tcPr marL="91440" marR="91440" marT="45720" marB="45720" anchor="ctr">
                     <a:lnL w="6350" cap="flat" cmpd="sng" algn="ctr">
                       <a:solidFill>
-                        <a:srgbClr val="B3B3B3"/>
+                        <a:srgbClr val="CBD5E1"/>
                       </a:solidFill>
                       <a:prstDash val="solid"/>
                       <a:round/>
@@ -6084,7 +6084,7 @@
                     </a:lnL>
                     <a:lnR w="6350" cap="flat" cmpd="sng" algn="ctr">
                       <a:solidFill>
-                        <a:srgbClr val="B3B3B3"/>
+                        <a:srgbClr val="CBD5E1"/>
                       </a:solidFill>
                       <a:prstDash val="solid"/>
                       <a:round/>
@@ -6093,7 +6093,7 @@
                     </a:lnR>
                     <a:lnT w="6350" cap="flat" cmpd="sng" algn="ctr">
                       <a:solidFill>
-                        <a:srgbClr val="B3B3B3"/>
+                        <a:srgbClr val="CBD5E1"/>
                       </a:solidFill>
                       <a:prstDash val="solid"/>
                       <a:round/>
@@ -6102,7 +6102,7 @@
                     </a:lnT>
                     <a:lnB w="6350" cap="flat" cmpd="sng" algn="ctr">
                       <a:solidFill>
-                        <a:srgbClr val="B3B3B3"/>
+                        <a:srgbClr val="CBD5E1"/>
                       </a:solidFill>
                       <a:prstDash val="solid"/>
                       <a:round/>
@@ -6143,7 +6143,7 @@
             <a:r>
               <a:rPr lang="en-US" sz="1300" dirty="0">
                 <a:solidFill>
-                  <a:srgbClr val="6E6E6E"/>
+                  <a:srgbClr val="64748B"/>
                 </a:solidFill>
                 <a:latin typeface="Arial" pitchFamily="34" charset="0"/>
                 <a:ea typeface="Arial" pitchFamily="34" charset="-122"/>
@@ -6169,7 +6169,7 @@
     <p:bg>
       <p:bgPr>
         <a:solidFill>
-          <a:srgbClr val="1A1A1A"/>
+          <a:srgbClr val="005AAA"/>
         </a:solidFill>
       </p:bgPr>
     </p:bg>
@@ -6214,7 +6214,7 @@
             <a:r>
               <a:rPr lang="en-US" sz="1200" spc="150" kern="0" dirty="0">
                 <a:solidFill>
-                  <a:srgbClr val="9E9E9E"/>
+                  <a:srgbClr val="A8C6E2"/>
                 </a:solidFill>
                 <a:latin typeface="Arial" pitchFamily="34" charset="0"/>
                 <a:ea typeface="Arial" pitchFamily="34" charset="-122"/>
@@ -6315,7 +6315,7 @@
             <a:r>
               <a:rPr lang="en-US" sz="1700" dirty="0">
                 <a:solidFill>
-                  <a:srgbClr val="C9C9C9"/>
+                  <a:srgbClr val="D6E6F2"/>
                 </a:solidFill>
                 <a:latin typeface="Arial" pitchFamily="34" charset="0"/>
                 <a:ea typeface="Arial" pitchFamily="34" charset="-122"/>
@@ -6386,7 +6386,7 @@
             <a:r>
               <a:rPr lang="en-US" sz="1200" spc="150" kern="0" dirty="0">
                 <a:solidFill>
-                  <a:srgbClr val="6E6E6E"/>
+                  <a:srgbClr val="64748B"/>
                 </a:solidFill>
                 <a:latin typeface="Arial" pitchFamily="34" charset="0"/>
                 <a:ea typeface="Arial" pitchFamily="34" charset="-122"/>
@@ -6425,7 +6425,7 @@
             <a:r>
               <a:rPr lang="en-US" sz="4000" b="1" dirty="0">
                 <a:solidFill>
-                  <a:srgbClr val="1A1A1A"/>
+                  <a:srgbClr val="E70F47"/>
                 </a:solidFill>
                 <a:latin typeface="Arial" pitchFamily="34" charset="0"/>
                 <a:ea typeface="Arial" pitchFamily="34" charset="-122"/>
@@ -6454,11 +6454,11 @@
             </a:avLst>
           </a:prstGeom>
           <a:solidFill>
-            <a:srgbClr val="F2F2F2"/>
+            <a:srgbClr val="F8FAFC"/>
           </a:solidFill>
-          <a:ln w="6350">
+          <a:ln w="9525">
             <a:solidFill>
-              <a:srgbClr val="B3B3B3"/>
+              <a:srgbClr val="CBD5E1"/>
             </a:solidFill>
             <a:prstDash val="solid"/>
           </a:ln>
@@ -6491,7 +6491,7 @@
             <a:r>
               <a:rPr lang="en-US" sz="1500" dirty="0">
                 <a:solidFill>
-                  <a:srgbClr val="1A1A1A"/>
+                  <a:srgbClr val="1E293B"/>
                 </a:solidFill>
                 <a:latin typeface="Arial" pitchFamily="34" charset="0"/>
                 <a:ea typeface="Arial" pitchFamily="34" charset="-122"/>
@@ -6517,7 +6517,7 @@
     <p:bg>
       <p:bgPr>
         <a:solidFill>
-          <a:srgbClr val="1A1A1A"/>
+          <a:srgbClr val="005AAA"/>
         </a:solidFill>
       </p:bgPr>
     </p:bg>
@@ -6562,7 +6562,7 @@
             <a:r>
               <a:rPr lang="en-US" sz="1200" spc="150" kern="0" dirty="0">
                 <a:solidFill>
-                  <a:srgbClr val="9E9E9E"/>
+                  <a:srgbClr val="A8C6E2"/>
                 </a:solidFill>
                 <a:latin typeface="Arial" pitchFamily="34" charset="0"/>
                 <a:ea typeface="Arial" pitchFamily="34" charset="-122"/>
@@ -6683,7 +6683,7 @@
             <a:r>
               <a:rPr lang="en-US" sz="1700" dirty="0">
                 <a:solidFill>
-                  <a:srgbClr val="C9C9C9"/>
+                  <a:srgbClr val="D6E6F2"/>
                 </a:solidFill>
                 <a:latin typeface="Arial" pitchFamily="34" charset="0"/>
                 <a:ea typeface="Arial" pitchFamily="34" charset="-122"/>
@@ -6754,7 +6754,7 @@
             <a:r>
               <a:rPr lang="en-US" sz="1200" spc="150" kern="0" dirty="0">
                 <a:solidFill>
-                  <a:srgbClr val="6E6E6E"/>
+                  <a:srgbClr val="64748B"/>
                 </a:solidFill>
                 <a:latin typeface="Arial" pitchFamily="34" charset="0"/>
                 <a:ea typeface="Arial" pitchFamily="34" charset="-122"/>
@@ -6793,7 +6793,7 @@
             <a:r>
               <a:rPr lang="en-US" sz="4000" b="1" dirty="0">
                 <a:solidFill>
-                  <a:srgbClr val="1A1A1A"/>
+                  <a:srgbClr val="E70F47"/>
                 </a:solidFill>
                 <a:latin typeface="Arial" pitchFamily="34" charset="0"/>
                 <a:ea typeface="Arial" pitchFamily="34" charset="-122"/>
@@ -6822,11 +6822,11 @@
             </a:avLst>
           </a:prstGeom>
           <a:solidFill>
-            <a:srgbClr val="F2F2F2"/>
+            <a:srgbClr val="F8FAFC"/>
           </a:solidFill>
-          <a:ln w="6350">
+          <a:ln w="9525">
             <a:solidFill>
-              <a:srgbClr val="B3B3B3"/>
+              <a:srgbClr val="CBD5E1"/>
             </a:solidFill>
             <a:prstDash val="solid"/>
           </a:ln>
@@ -6859,7 +6859,7 @@
             <a:r>
               <a:rPr lang="en-US" sz="1500" dirty="0">
                 <a:solidFill>
-                  <a:srgbClr val="1A1A1A"/>
+                  <a:srgbClr val="1E293B"/>
                 </a:solidFill>
                 <a:latin typeface="Arial" pitchFamily="34" charset="0"/>
                 <a:ea typeface="Arial" pitchFamily="34" charset="-122"/>
